--- a/OpenHelix-Pitch-Deck.pptx
+++ b/OpenHelix-Pitch-Deck.pptx
@@ -137,7 +137,7 @@
               <c:strCache>
                 <c:ptCount val="1"/>
                 <c:pt idx="0">
-                  <c:v>HLIX</c:v>
+                  <c:v>PHELIX</c:v>
                 </c:pt>
               </c:strCache>
             </c:strRef>
@@ -8528,7 +8528,7 @@
                 <a:ea typeface="Bookman Old Style" pitchFamily="34" charset="-122"/>
                 <a:cs typeface="Bookman Old Style" pitchFamily="34" charset="-120"/>
               </a:rPr>
-              <a:t>HLIX — built for governance, incentives &amp; participation.</a:t>
+              <a:t>PHELIX — built for governance, incentives &amp; participation.</a:t>
             </a:r>
             <a:endParaRPr lang="en-US" sz="2700" dirty="0"/>
           </a:p>
@@ -8567,7 +8567,7 @@
                 <a:ea typeface="Bookman Old Style" pitchFamily="34" charset="-122"/>
                 <a:cs typeface="Bookman Old Style" pitchFamily="34" charset="-120"/>
               </a:rPr>
-              <a:t>10B</a:t>
+              <a:t>3B</a:t>
             </a:r>
             <a:endParaRPr lang="en-US" sz="3000" dirty="0"/>
           </a:p>
@@ -8606,7 +8606,7 @@
                 <a:ea typeface="Calibri" pitchFamily="34" charset="-122"/>
                 <a:cs typeface="Calibri" pitchFamily="34" charset="-120"/>
               </a:rPr>
-              <a:t>MAX SUPPLY</a:t>
+              <a:t>TOTAL SUPPLY</a:t>
             </a:r>
             <a:endParaRPr lang="en-US" sz="1050" dirty="0"/>
           </a:p>
@@ -8792,8 +8792,8 @@
         </p:nvSpPr>
         <p:spPr>
           <a:xfrm>
-            <a:off x="8732520" y="3703320"/>
-            <a:ext cx="1371600" cy="457200"/>
+            <a:off x="8503920" y="3703320"/>
+            <a:ext cx="1828800" cy="457200"/>
           </a:xfrm>
           <a:prstGeom prst="rect">
             <a:avLst/>
@@ -8817,7 +8817,7 @@
                 <a:ea typeface="Bookman Old Style" pitchFamily="34" charset="-122"/>
                 <a:cs typeface="Bookman Old Style" pitchFamily="34" charset="-120"/>
               </a:rPr>
-              <a:t>HLIX</a:t>
+              <a:t>PHELIX</a:t>
             </a:r>
             <a:endParaRPr lang="en-US" sz="2000" dirty="0"/>
           </a:p>
